--- a/Vízibicikli_weboldal.pptx
+++ b/Vízibicikli_weboldal.pptx
@@ -12,7 +12,8 @@
     <p:sldId id="260" r:id="rId6"/>
     <p:sldId id="261" r:id="rId7"/>
     <p:sldId id="262" r:id="rId8"/>
-    <p:sldId id="263" r:id="rId9"/>
+    <p:sldId id="264" r:id="rId9"/>
+    <p:sldId id="263" r:id="rId10"/>
   </p:sldIdLst>
   <p:sldSz cx="12192000" cy="6858000"/>
   <p:notesSz cx="6858000" cy="9144000"/>
@@ -122,7 +123,7 @@
 <file path=ppt/revisionInfo.xml><?xml version="1.0" encoding="utf-8"?>
 <p1510:revInfo xmlns:a="http://schemas.openxmlformats.org/drawingml/2006/main" xmlns:r="http://schemas.openxmlformats.org/officeDocument/2006/relationships" xmlns:p1510="http://schemas.microsoft.com/office/powerpoint/2015/10/main">
   <p1510:revLst>
-    <p1510:client id="{C89160C3-1811-48E8-B4E4-AE29BA3B731B}" v="770" dt="2026-09-27T15:00:56.881"/>
+    <p1510:client id="{C89160C3-1811-48E8-B4E4-AE29BA3B731B}" v="896" dt="2026-09-27T17:10:56.838"/>
   </p1510:revLst>
 </p1510:revInfo>
 </file>
@@ -7274,7 +7275,7 @@
           <a:lstStyle/>
           <a:p>
             <a:r>
-              <a:rPr lang="en-US" sz="4800" kern="1200">
+              <a:rPr lang="en-US" sz="4800" kern="1200" dirty="0">
                 <a:solidFill>
                   <a:schemeClr val="bg1"/>
                 </a:solidFill>
@@ -7282,7 +7283,34 @@
                 <a:ea typeface="+mj-ea"/>
                 <a:cs typeface="+mj-cs"/>
               </a:rPr>
-              <a:t>A fejléc:</a:t>
+              <a:t>A </a:t>
+            </a:r>
+            <a:r>
+              <a:rPr lang="en-US" sz="4800" dirty="0">
+                <a:solidFill>
+                  <a:schemeClr val="bg1"/>
+                </a:solidFill>
+              </a:rPr>
+              <a:t>nav </a:t>
+            </a:r>
+            <a:r>
+              <a:rPr lang="en-US" sz="4800" dirty="0" err="1">
+                <a:solidFill>
+                  <a:schemeClr val="bg1"/>
+                </a:solidFill>
+              </a:rPr>
+              <a:t>menü</a:t>
+            </a:r>
+            <a:r>
+              <a:rPr lang="en-US" sz="4800" kern="1200" dirty="0">
+                <a:solidFill>
+                  <a:schemeClr val="bg1"/>
+                </a:solidFill>
+                <a:latin typeface="+mj-lt"/>
+                <a:ea typeface="+mj-ea"/>
+                <a:cs typeface="+mj-cs"/>
+              </a:rPr>
+              <a:t>:</a:t>
             </a:r>
           </a:p>
         </p:txBody>
@@ -7679,7 +7707,7 @@
           <a:noFill/>
         </p:spPr>
         <p:txBody>
-          <a:bodyPr vert="horz" lIns="91440" tIns="45720" rIns="91440" bIns="45720" rtlCol="0">
+          <a:bodyPr vert="horz" lIns="91440" tIns="45720" rIns="91440" bIns="45720" rtlCol="0" anchor="t">
             <a:normAutofit/>
           </a:bodyPr>
           <a:lstStyle/>
@@ -7688,7 +7716,7 @@
               <a:buNone/>
             </a:pPr>
             <a:r>
-              <a:rPr lang="en-US" sz="1800" kern="1200">
+              <a:rPr lang="en-US" sz="1800" kern="1200" dirty="0">
                 <a:solidFill>
                   <a:schemeClr val="bg1"/>
                 </a:solidFill>
@@ -7696,7 +7724,251 @@
                 <a:ea typeface="+mn-ea"/>
                 <a:cs typeface="+mn-cs"/>
               </a:rPr>
-              <a:t>A fejlécben találhatóak az oldal különböző részeihez hivatkozások, valamint egy gomb a foglaláshoz.</a:t>
+              <a:t>A </a:t>
+            </a:r>
+            <a:r>
+              <a:rPr lang="en-US" sz="1800" dirty="0">
+                <a:solidFill>
+                  <a:schemeClr val="bg1"/>
+                </a:solidFill>
+              </a:rPr>
+              <a:t>nav </a:t>
+            </a:r>
+            <a:r>
+              <a:rPr lang="en-US" sz="1800" dirty="0" err="1">
+                <a:solidFill>
+                  <a:schemeClr val="bg1"/>
+                </a:solidFill>
+              </a:rPr>
+              <a:t>menüben</a:t>
+            </a:r>
+            <a:r>
+              <a:rPr lang="en-US" sz="1800" dirty="0">
+                <a:solidFill>
+                  <a:schemeClr val="bg1"/>
+                </a:solidFill>
+              </a:rPr>
+              <a:t> </a:t>
+            </a:r>
+            <a:r>
+              <a:rPr lang="en-US" sz="1800" kern="1200" dirty="0" err="1">
+                <a:solidFill>
+                  <a:schemeClr val="bg1"/>
+                </a:solidFill>
+                <a:latin typeface="+mn-lt"/>
+                <a:ea typeface="+mn-ea"/>
+                <a:cs typeface="+mn-cs"/>
+              </a:rPr>
+              <a:t>találhatóak</a:t>
+            </a:r>
+            <a:r>
+              <a:rPr lang="en-US" sz="1800" kern="1200" dirty="0">
+                <a:solidFill>
+                  <a:schemeClr val="bg1"/>
+                </a:solidFill>
+                <a:latin typeface="+mn-lt"/>
+                <a:ea typeface="+mn-ea"/>
+                <a:cs typeface="+mn-cs"/>
+              </a:rPr>
+              <a:t> </a:t>
+            </a:r>
+            <a:r>
+              <a:rPr lang="en-US" sz="1800" kern="1200" dirty="0" err="1">
+                <a:solidFill>
+                  <a:schemeClr val="bg1"/>
+                </a:solidFill>
+                <a:latin typeface="+mn-lt"/>
+                <a:ea typeface="+mn-ea"/>
+                <a:cs typeface="+mn-cs"/>
+              </a:rPr>
+              <a:t>az</a:t>
+            </a:r>
+            <a:r>
+              <a:rPr lang="en-US" sz="1800" kern="1200" dirty="0">
+                <a:solidFill>
+                  <a:schemeClr val="bg1"/>
+                </a:solidFill>
+                <a:latin typeface="+mn-lt"/>
+                <a:ea typeface="+mn-ea"/>
+                <a:cs typeface="+mn-cs"/>
+              </a:rPr>
+              <a:t> </a:t>
+            </a:r>
+            <a:r>
+              <a:rPr lang="en-US" sz="1800" kern="1200" dirty="0" err="1">
+                <a:solidFill>
+                  <a:schemeClr val="bg1"/>
+                </a:solidFill>
+                <a:latin typeface="+mn-lt"/>
+                <a:ea typeface="+mn-ea"/>
+                <a:cs typeface="+mn-cs"/>
+              </a:rPr>
+              <a:t>oldal</a:t>
+            </a:r>
+            <a:r>
+              <a:rPr lang="en-US" sz="1800" kern="1200" dirty="0">
+                <a:solidFill>
+                  <a:schemeClr val="bg1"/>
+                </a:solidFill>
+                <a:latin typeface="+mn-lt"/>
+                <a:ea typeface="+mn-ea"/>
+                <a:cs typeface="+mn-cs"/>
+              </a:rPr>
+              <a:t> </a:t>
+            </a:r>
+            <a:r>
+              <a:rPr lang="en-US" sz="1800" kern="1200" dirty="0" err="1">
+                <a:solidFill>
+                  <a:schemeClr val="bg1"/>
+                </a:solidFill>
+                <a:latin typeface="+mn-lt"/>
+                <a:ea typeface="+mn-ea"/>
+                <a:cs typeface="+mn-cs"/>
+              </a:rPr>
+              <a:t>különböző</a:t>
+            </a:r>
+            <a:r>
+              <a:rPr lang="en-US" sz="1800" kern="1200" dirty="0">
+                <a:solidFill>
+                  <a:schemeClr val="bg1"/>
+                </a:solidFill>
+                <a:latin typeface="+mn-lt"/>
+                <a:ea typeface="+mn-ea"/>
+                <a:cs typeface="+mn-cs"/>
+              </a:rPr>
+              <a:t> </a:t>
+            </a:r>
+            <a:r>
+              <a:rPr lang="en-US" sz="1800" kern="1200" dirty="0" err="1">
+                <a:solidFill>
+                  <a:schemeClr val="bg1"/>
+                </a:solidFill>
+                <a:latin typeface="+mn-lt"/>
+                <a:ea typeface="+mn-ea"/>
+                <a:cs typeface="+mn-cs"/>
+              </a:rPr>
+              <a:t>részeihez</a:t>
+            </a:r>
+            <a:r>
+              <a:rPr lang="en-US" sz="1800" kern="1200" dirty="0">
+                <a:solidFill>
+                  <a:schemeClr val="bg1"/>
+                </a:solidFill>
+                <a:latin typeface="+mn-lt"/>
+                <a:ea typeface="+mn-ea"/>
+                <a:cs typeface="+mn-cs"/>
+              </a:rPr>
+              <a:t> </a:t>
+            </a:r>
+            <a:r>
+              <a:rPr lang="en-US" sz="1800" kern="1200" dirty="0" err="1">
+                <a:solidFill>
+                  <a:schemeClr val="bg1"/>
+                </a:solidFill>
+                <a:latin typeface="+mn-lt"/>
+                <a:ea typeface="+mn-ea"/>
+                <a:cs typeface="+mn-cs"/>
+              </a:rPr>
+              <a:t>hivatkozások</a:t>
+            </a:r>
+            <a:r>
+              <a:rPr lang="en-US" sz="1800" kern="1200" dirty="0">
+                <a:solidFill>
+                  <a:schemeClr val="bg1"/>
+                </a:solidFill>
+                <a:latin typeface="+mn-lt"/>
+                <a:ea typeface="+mn-ea"/>
+                <a:cs typeface="+mn-cs"/>
+              </a:rPr>
+              <a:t>, </a:t>
+            </a:r>
+            <a:r>
+              <a:rPr lang="en-US" sz="1800" kern="1200" dirty="0" err="1">
+                <a:solidFill>
+                  <a:schemeClr val="bg1"/>
+                </a:solidFill>
+                <a:latin typeface="+mn-lt"/>
+                <a:ea typeface="+mn-ea"/>
+                <a:cs typeface="+mn-cs"/>
+              </a:rPr>
+              <a:t>valamint</a:t>
+            </a:r>
+            <a:r>
+              <a:rPr lang="en-US" sz="1800" kern="1200" dirty="0">
+                <a:solidFill>
+                  <a:schemeClr val="bg1"/>
+                </a:solidFill>
+                <a:latin typeface="+mn-lt"/>
+                <a:ea typeface="+mn-ea"/>
+                <a:cs typeface="+mn-cs"/>
+              </a:rPr>
+              <a:t> </a:t>
+            </a:r>
+            <a:r>
+              <a:rPr lang="en-US" sz="1800" kern="1200" dirty="0" err="1">
+                <a:solidFill>
+                  <a:schemeClr val="bg1"/>
+                </a:solidFill>
+                <a:latin typeface="+mn-lt"/>
+                <a:ea typeface="+mn-ea"/>
+                <a:cs typeface="+mn-cs"/>
+              </a:rPr>
+              <a:t>egy</a:t>
+            </a:r>
+            <a:r>
+              <a:rPr lang="en-US" sz="1800" kern="1200" dirty="0">
+                <a:solidFill>
+                  <a:schemeClr val="bg1"/>
+                </a:solidFill>
+                <a:latin typeface="+mn-lt"/>
+                <a:ea typeface="+mn-ea"/>
+                <a:cs typeface="+mn-cs"/>
+              </a:rPr>
+              <a:t> </a:t>
+            </a:r>
+            <a:r>
+              <a:rPr lang="en-US" sz="1800" kern="1200" dirty="0" err="1">
+                <a:solidFill>
+                  <a:schemeClr val="bg1"/>
+                </a:solidFill>
+                <a:latin typeface="+mn-lt"/>
+                <a:ea typeface="+mn-ea"/>
+                <a:cs typeface="+mn-cs"/>
+              </a:rPr>
+              <a:t>gomb</a:t>
+            </a:r>
+            <a:r>
+              <a:rPr lang="en-US" sz="1800" kern="1200" dirty="0">
+                <a:solidFill>
+                  <a:schemeClr val="bg1"/>
+                </a:solidFill>
+                <a:latin typeface="+mn-lt"/>
+                <a:ea typeface="+mn-ea"/>
+                <a:cs typeface="+mn-cs"/>
+              </a:rPr>
+              <a:t> a </a:t>
+            </a:r>
+            <a:r>
+              <a:rPr lang="en-US" sz="1800" kern="1200" dirty="0" err="1">
+                <a:solidFill>
+                  <a:schemeClr val="bg1"/>
+                </a:solidFill>
+                <a:latin typeface="+mn-lt"/>
+                <a:ea typeface="+mn-ea"/>
+                <a:cs typeface="+mn-cs"/>
+              </a:rPr>
+              <a:t>foglaláshoz</a:t>
+            </a:r>
+            <a:r>
+              <a:rPr lang="en-US" sz="1800" kern="1200" dirty="0">
+                <a:solidFill>
+                  <a:schemeClr val="bg1"/>
+                </a:solidFill>
+                <a:latin typeface="+mn-lt"/>
+                <a:ea typeface="+mn-ea"/>
+                <a:cs typeface="+mn-cs"/>
+              </a:rPr>
+              <a:t>.</a:t>
             </a:r>
           </a:p>
         </p:txBody>
@@ -12570,6 +12842,347 @@
 </file>
 
 <file path=ppt/slides/slide8.xml><?xml version="1.0" encoding="utf-8"?>
+<p:sld xmlns:a="http://schemas.openxmlformats.org/drawingml/2006/main" xmlns:r="http://schemas.openxmlformats.org/officeDocument/2006/relationships" xmlns:p="http://schemas.openxmlformats.org/presentationml/2006/main">
+  <p:cSld>
+    <p:bg>
+      <p:bgPr>
+        <a:solidFill>
+          <a:schemeClr val="bg1"/>
+        </a:solidFill>
+        <a:effectLst/>
+      </p:bgPr>
+    </p:bg>
+    <p:spTree>
+      <p:nvGrpSpPr>
+        <p:cNvPr id="1" name=""/>
+        <p:cNvGrpSpPr/>
+        <p:nvPr/>
+      </p:nvGrpSpPr>
+      <p:grpSpPr>
+        <a:xfrm>
+          <a:off x="0" y="0"/>
+          <a:ext cx="0" cy="0"/>
+          <a:chOff x="0" y="0"/>
+          <a:chExt cx="0" cy="0"/>
+        </a:xfrm>
+      </p:grpSpPr>
+      <p:sp>
+        <p:nvSpPr>
+          <p:cNvPr id="9" name="Rectangle 8">
+            <a:extLst>
+              <a:ext uri="{FF2B5EF4-FFF2-40B4-BE49-F238E27FC236}">
+                <a16:creationId xmlns:a16="http://schemas.microsoft.com/office/drawing/2014/main" id="{6753252F-4873-4F63-801D-CC719279A7D5}"/>
+              </a:ext>
+              <a:ext uri="{C183D7F6-B498-43B3-948B-1728B52AA6E4}">
+                <adec:decorative xmlns:adec="http://schemas.microsoft.com/office/drawing/2017/decorative" val="1"/>
+              </a:ext>
+            </a:extLst>
+          </p:cNvPr>
+          <p:cNvSpPr>
+            <a:spLocks noGrp="1" noRot="1" noChangeAspect="1" noMove="1" noResize="1" noEditPoints="1" noAdjustHandles="1" noChangeArrowheads="1" noChangeShapeType="1" noTextEdit="1"/>
+          </p:cNvSpPr>
+          <p:nvPr>
+            <p:extLst>
+              <p:ext uri="{386F3935-93C4-4BCD-93E2-E3B085C9AB24}">
+                <p16:designElem xmlns:p16="http://schemas.microsoft.com/office/powerpoint/2015/main" val="1"/>
+              </p:ext>
+            </p:extLst>
+          </p:nvPr>
+        </p:nvSpPr>
+        <p:spPr>
+          <a:xfrm>
+            <a:off x="0" y="0"/>
+            <a:ext cx="12192000" cy="6858000"/>
+          </a:xfrm>
+          <a:prstGeom prst="rect">
+            <a:avLst/>
+          </a:prstGeom>
+          <a:solidFill>
+            <a:srgbClr val="FFFFFF"/>
+          </a:solidFill>
+          <a:ln>
+            <a:noFill/>
+          </a:ln>
+        </p:spPr>
+        <p:style>
+          <a:lnRef idx="2">
+            <a:schemeClr val="accent1">
+              <a:shade val="50000"/>
+            </a:schemeClr>
+          </a:lnRef>
+          <a:fillRef idx="1">
+            <a:schemeClr val="accent1"/>
+          </a:fillRef>
+          <a:effectRef idx="0">
+            <a:schemeClr val="accent1"/>
+          </a:effectRef>
+          <a:fontRef idx="minor">
+            <a:schemeClr val="lt1"/>
+          </a:fontRef>
+        </p:style>
+        <p:txBody>
+          <a:bodyPr rtlCol="0" anchor="ctr"/>
+          <a:lstStyle/>
+          <a:p>
+            <a:pPr algn="ctr"/>
+            <a:endParaRPr lang="en-US"/>
+          </a:p>
+        </p:txBody>
+      </p:sp>
+      <p:sp>
+        <p:nvSpPr>
+          <p:cNvPr id="11" name="Rectangle 10">
+            <a:extLst>
+              <a:ext uri="{FF2B5EF4-FFF2-40B4-BE49-F238E27FC236}">
+                <a16:creationId xmlns:a16="http://schemas.microsoft.com/office/drawing/2014/main" id="{047C8CCB-F95D-4249-92DD-651249D3535A}"/>
+              </a:ext>
+              <a:ext uri="{C183D7F6-B498-43B3-948B-1728B52AA6E4}">
+                <adec:decorative xmlns:adec="http://schemas.microsoft.com/office/drawing/2017/decorative" val="1"/>
+              </a:ext>
+            </a:extLst>
+          </p:cNvPr>
+          <p:cNvSpPr>
+            <a:spLocks noGrp="1" noRot="1" noChangeAspect="1" noMove="1" noResize="1" noEditPoints="1" noAdjustHandles="1" noChangeArrowheads="1" noChangeShapeType="1" noTextEdit="1"/>
+          </p:cNvSpPr>
+          <p:nvPr>
+            <p:extLst>
+              <p:ext uri="{386F3935-93C4-4BCD-93E2-E3B085C9AB24}">
+                <p16:designElem xmlns:p16="http://schemas.microsoft.com/office/powerpoint/2015/main" val="1"/>
+              </p:ext>
+            </p:extLst>
+          </p:nvPr>
+        </p:nvSpPr>
+        <p:spPr>
+          <a:xfrm>
+            <a:off x="0" y="0"/>
+            <a:ext cx="2013557" cy="6858000"/>
+          </a:xfrm>
+          <a:prstGeom prst="rect">
+            <a:avLst/>
+          </a:prstGeom>
+          <a:solidFill>
+            <a:srgbClr val="404461"/>
+          </a:solidFill>
+          <a:ln>
+            <a:noFill/>
+          </a:ln>
+        </p:spPr>
+        <p:style>
+          <a:lnRef idx="2">
+            <a:schemeClr val="accent1">
+              <a:shade val="50000"/>
+            </a:schemeClr>
+          </a:lnRef>
+          <a:fillRef idx="1">
+            <a:schemeClr val="accent1"/>
+          </a:fillRef>
+          <a:effectRef idx="0">
+            <a:schemeClr val="accent1"/>
+          </a:effectRef>
+          <a:fontRef idx="minor">
+            <a:schemeClr val="lt1"/>
+          </a:fontRef>
+        </p:style>
+        <p:txBody>
+          <a:bodyPr rtlCol="0" anchor="ctr"/>
+          <a:lstStyle/>
+          <a:p>
+            <a:pPr algn="ctr"/>
+            <a:endParaRPr lang="en-US"/>
+          </a:p>
+        </p:txBody>
+      </p:sp>
+      <p:sp>
+        <p:nvSpPr>
+          <p:cNvPr id="2" name="Title 1">
+            <a:extLst>
+              <a:ext uri="{FF2B5EF4-FFF2-40B4-BE49-F238E27FC236}">
+                <a16:creationId xmlns:a16="http://schemas.microsoft.com/office/drawing/2014/main" id="{5AE9D3F6-FFDC-3FB6-DCED-15AC2D0BA4C6}"/>
+              </a:ext>
+            </a:extLst>
+          </p:cNvPr>
+          <p:cNvSpPr>
+            <a:spLocks noGrp="1"/>
+          </p:cNvSpPr>
+          <p:nvPr>
+            <p:ph type="title"/>
+          </p:nvPr>
+        </p:nvSpPr>
+        <p:spPr>
+          <a:xfrm>
+            <a:off x="640080" y="2074363"/>
+            <a:ext cx="2752354" cy="2709275"/>
+          </a:xfrm>
+          <a:prstGeom prst="ellipse">
+            <a:avLst/>
+          </a:prstGeom>
+          <a:solidFill>
+            <a:srgbClr val="262626"/>
+          </a:solidFill>
+          <a:ln w="174625" cmpd="thinThick">
+            <a:solidFill>
+              <a:srgbClr val="262626"/>
+            </a:solidFill>
+          </a:ln>
+        </p:spPr>
+        <p:txBody>
+          <a:bodyPr vert="horz" lIns="91440" tIns="45720" rIns="91440" bIns="45720" rtlCol="0" anchor="ctr">
+            <a:normAutofit/>
+          </a:bodyPr>
+          <a:lstStyle/>
+          <a:p>
+            <a:pPr algn="ctr"/>
+            <a:r>
+              <a:rPr lang="en-US" sz="2600" kern="1200">
+                <a:solidFill>
+                  <a:srgbClr val="FFFFFF"/>
+                </a:solidFill>
+                <a:latin typeface="+mj-lt"/>
+                <a:ea typeface="+mj-ea"/>
+                <a:cs typeface="+mj-cs"/>
+              </a:rPr>
+              <a:t>Foglalás sikeressége</a:t>
+            </a:r>
+          </a:p>
+        </p:txBody>
+      </p:sp>
+      <p:pic>
+        <p:nvPicPr>
+          <p:cNvPr id="4" name="Content Placeholder 3" descr="A screenshot of a computer&#10;&#10;AI-generated content may be incorrect.">
+            <a:extLst>
+              <a:ext uri="{FF2B5EF4-FFF2-40B4-BE49-F238E27FC236}">
+                <a16:creationId xmlns:a16="http://schemas.microsoft.com/office/drawing/2014/main" id="{E3D1FEC3-B740-3D7D-5BB2-716F16A0A9BB}"/>
+              </a:ext>
+            </a:extLst>
+          </p:cNvPr>
+          <p:cNvPicPr>
+            <a:picLocks noGrp="1" noChangeAspect="1"/>
+          </p:cNvPicPr>
+          <p:nvPr>
+            <p:ph idx="1"/>
+          </p:nvPr>
+        </p:nvPicPr>
+        <p:blipFill>
+          <a:blip r:embed="rId2"/>
+          <a:stretch>
+            <a:fillRect/>
+          </a:stretch>
+        </p:blipFill>
+        <p:spPr>
+          <a:xfrm>
+            <a:off x="4024357" y="229518"/>
+            <a:ext cx="7188199" cy="3504246"/>
+          </a:xfrm>
+          <a:prstGeom prst="rect">
+            <a:avLst/>
+          </a:prstGeom>
+        </p:spPr>
+      </p:pic>
+      <p:sp>
+        <p:nvSpPr>
+          <p:cNvPr id="5" name="TextBox 4">
+            <a:extLst>
+              <a:ext uri="{FF2B5EF4-FFF2-40B4-BE49-F238E27FC236}">
+                <a16:creationId xmlns:a16="http://schemas.microsoft.com/office/drawing/2014/main" id="{B5491F49-120D-40CC-8319-2A5B0959A746}"/>
+              </a:ext>
+            </a:extLst>
+          </p:cNvPr>
+          <p:cNvSpPr txBox="1"/>
+          <p:nvPr/>
+        </p:nvSpPr>
+        <p:spPr>
+          <a:xfrm>
+            <a:off x="4080616" y="3952430"/>
+            <a:ext cx="7071646" cy="369332"/>
+          </a:xfrm>
+          <a:prstGeom prst="rect">
+            <a:avLst/>
+          </a:prstGeom>
+          <a:noFill/>
+        </p:spPr>
+        <p:txBody>
+          <a:bodyPr rot="0" spcFirstLastPara="0" vertOverflow="overflow" horzOverflow="overflow" vert="horz" wrap="square" lIns="91440" tIns="45720" rIns="91440" bIns="45720" numCol="1" spcCol="0" rtlCol="0" fromWordArt="0" anchor="t" anchorCtr="0" forceAA="0" compatLnSpc="1">
+            <a:prstTxWarp prst="textNoShape">
+              <a:avLst/>
+            </a:prstTxWarp>
+            <a:spAutoFit/>
+          </a:bodyPr>
+          <a:lstStyle/>
+          <a:p>
+            <a:pPr marL="285750" indent="-285750">
+              <a:buFont typeface="Arial"/>
+              <a:buChar char="•"/>
+            </a:pPr>
+            <a:r>
+              <a:rPr lang="en-GB" dirty="0"/>
+              <a:t>A </a:t>
+            </a:r>
+            <a:r>
+              <a:rPr lang="en-GB" dirty="0" err="1"/>
+              <a:t>foglalás</a:t>
+            </a:r>
+            <a:r>
+              <a:rPr lang="en-GB" dirty="0"/>
+              <a:t> </a:t>
+            </a:r>
+            <a:r>
+              <a:rPr lang="en-GB" dirty="0" err="1"/>
+              <a:t>elküldése</a:t>
+            </a:r>
+            <a:r>
+              <a:rPr lang="en-GB" dirty="0"/>
+              <a:t> </a:t>
+            </a:r>
+            <a:r>
+              <a:rPr lang="en-GB" dirty="0" err="1"/>
+              <a:t>után</a:t>
+            </a:r>
+            <a:r>
+              <a:rPr lang="en-GB" dirty="0"/>
+              <a:t> </a:t>
+            </a:r>
+            <a:r>
+              <a:rPr lang="en-GB" dirty="0" err="1"/>
+              <a:t>egy</a:t>
+            </a:r>
+            <a:r>
+              <a:rPr lang="en-GB" dirty="0"/>
+              <a:t> </a:t>
+            </a:r>
+            <a:r>
+              <a:rPr lang="en-GB" dirty="0" err="1"/>
+              <a:t>visszaigazolás</a:t>
+            </a:r>
+            <a:r>
+              <a:rPr lang="en-GB" dirty="0"/>
+              <a:t> a </a:t>
+            </a:r>
+            <a:r>
+              <a:rPr lang="en-GB" dirty="0" err="1"/>
+              <a:t>sikerességről</a:t>
+            </a:r>
+            <a:r>
+              <a:rPr lang="en-GB" dirty="0"/>
+              <a:t>.</a:t>
+            </a:r>
+            <a:endParaRPr lang="en-US"/>
+          </a:p>
+        </p:txBody>
+      </p:sp>
+    </p:spTree>
+    <p:extLst>
+      <p:ext uri="{BB962C8B-B14F-4D97-AF65-F5344CB8AC3E}">
+        <p14:creationId xmlns:p14="http://schemas.microsoft.com/office/powerpoint/2010/main" val="1527477448"/>
+      </p:ext>
+    </p:extLst>
+  </p:cSld>
+  <p:clrMapOvr>
+    <a:masterClrMapping/>
+  </p:clrMapOvr>
+</p:sld>
+</file>
+
+<file path=ppt/slides/slide9.xml><?xml version="1.0" encoding="utf-8"?>
 <p:sld xmlns:a="http://schemas.openxmlformats.org/drawingml/2006/main" xmlns:r="http://schemas.openxmlformats.org/officeDocument/2006/relationships" xmlns:p="http://schemas.openxmlformats.org/presentationml/2006/main">
   <p:cSld>
     <p:bg>

--- a/Vízibicikli_weboldal.pptx
+++ b/Vízibicikli_weboldal.pptx
@@ -259,7 +259,7 @@
           <a:p>
             <a:fld id="{846CE7D5-CF57-46EF-B807-FDD0502418D4}" type="datetimeFigureOut">
               <a:rPr lang="en-GB" smtClean="0"/>
-              <a:t>27/09/2026</a:t>
+              <a:t>29/09/2026</a:t>
             </a:fld>
             <a:endParaRPr lang="en-GB"/>
           </a:p>
@@ -429,7 +429,7 @@
           <a:p>
             <a:fld id="{846CE7D5-CF57-46EF-B807-FDD0502418D4}" type="datetimeFigureOut">
               <a:rPr lang="en-GB" smtClean="0"/>
-              <a:t>27/09/2026</a:t>
+              <a:t>29/09/2026</a:t>
             </a:fld>
             <a:endParaRPr lang="en-GB"/>
           </a:p>
@@ -609,7 +609,7 @@
           <a:p>
             <a:fld id="{846CE7D5-CF57-46EF-B807-FDD0502418D4}" type="datetimeFigureOut">
               <a:rPr lang="en-GB" smtClean="0"/>
-              <a:t>27/09/2026</a:t>
+              <a:t>29/09/2026</a:t>
             </a:fld>
             <a:endParaRPr lang="en-GB"/>
           </a:p>
@@ -779,7 +779,7 @@
           <a:p>
             <a:fld id="{846CE7D5-CF57-46EF-B807-FDD0502418D4}" type="datetimeFigureOut">
               <a:rPr lang="en-GB" smtClean="0"/>
-              <a:t>27/09/2026</a:t>
+              <a:t>29/09/2026</a:t>
             </a:fld>
             <a:endParaRPr lang="en-GB"/>
           </a:p>
@@ -1025,7 +1025,7 @@
           <a:p>
             <a:fld id="{846CE7D5-CF57-46EF-B807-FDD0502418D4}" type="datetimeFigureOut">
               <a:rPr lang="en-GB" smtClean="0"/>
-              <a:t>27/09/2026</a:t>
+              <a:t>29/09/2026</a:t>
             </a:fld>
             <a:endParaRPr lang="en-GB"/>
           </a:p>
@@ -1257,7 +1257,7 @@
           <a:p>
             <a:fld id="{846CE7D5-CF57-46EF-B807-FDD0502418D4}" type="datetimeFigureOut">
               <a:rPr lang="en-GB" smtClean="0"/>
-              <a:t>27/09/2026</a:t>
+              <a:t>29/09/2026</a:t>
             </a:fld>
             <a:endParaRPr lang="en-GB"/>
           </a:p>
@@ -1624,7 +1624,7 @@
           <a:p>
             <a:fld id="{846CE7D5-CF57-46EF-B807-FDD0502418D4}" type="datetimeFigureOut">
               <a:rPr lang="en-GB" smtClean="0"/>
-              <a:t>27/09/2026</a:t>
+              <a:t>29/09/2026</a:t>
             </a:fld>
             <a:endParaRPr lang="en-GB"/>
           </a:p>
@@ -1742,7 +1742,7 @@
           <a:p>
             <a:fld id="{846CE7D5-CF57-46EF-B807-FDD0502418D4}" type="datetimeFigureOut">
               <a:rPr lang="en-GB" smtClean="0"/>
-              <a:t>27/09/2026</a:t>
+              <a:t>29/09/2026</a:t>
             </a:fld>
             <a:endParaRPr lang="en-GB"/>
           </a:p>
@@ -1837,7 +1837,7 @@
           <a:p>
             <a:fld id="{846CE7D5-CF57-46EF-B807-FDD0502418D4}" type="datetimeFigureOut">
               <a:rPr lang="en-GB" smtClean="0"/>
-              <a:t>27/09/2026</a:t>
+              <a:t>29/09/2026</a:t>
             </a:fld>
             <a:endParaRPr lang="en-GB"/>
           </a:p>
@@ -2114,7 +2114,7 @@
           <a:p>
             <a:fld id="{846CE7D5-CF57-46EF-B807-FDD0502418D4}" type="datetimeFigureOut">
               <a:rPr lang="en-GB" smtClean="0"/>
-              <a:t>27/09/2026</a:t>
+              <a:t>29/09/2026</a:t>
             </a:fld>
             <a:endParaRPr lang="en-GB"/>
           </a:p>
@@ -2367,7 +2367,7 @@
           <a:p>
             <a:fld id="{846CE7D5-CF57-46EF-B807-FDD0502418D4}" type="datetimeFigureOut">
               <a:rPr lang="en-GB" smtClean="0"/>
-              <a:t>27/09/2026</a:t>
+              <a:t>29/09/2026</a:t>
             </a:fld>
             <a:endParaRPr lang="en-GB"/>
           </a:p>
@@ -2580,7 +2580,7 @@
           <a:p>
             <a:fld id="{846CE7D5-CF57-46EF-B807-FDD0502418D4}" type="datetimeFigureOut">
               <a:rPr lang="en-GB" smtClean="0"/>
-              <a:t>27/09/2026</a:t>
+              <a:t>29/09/2026</a:t>
             </a:fld>
             <a:endParaRPr lang="en-GB"/>
           </a:p>
@@ -3249,7 +3249,7 @@
         </p:nvSpPr>
         <p:spPr>
           <a:xfrm>
-            <a:off x="1082409" y="3938715"/>
+            <a:off x="523041" y="145648"/>
             <a:ext cx="3034998" cy="1993620"/>
           </a:xfrm>
         </p:spPr>
@@ -3268,12 +3268,12 @@
               <a:t>A </a:t>
             </a:r>
             <a:r>
-              <a:rPr lang="en-US" sz="4000" dirty="0" err="1">
+              <a:rPr lang="hu-HU" sz="4000" dirty="0" err="1">
                 <a:solidFill>
                   <a:schemeClr val="tx2"/>
                 </a:solidFill>
               </a:rPr>
-              <a:t>képek</a:t>
+              <a:t>carousel</a:t>
             </a:r>
             <a:r>
               <a:rPr lang="en-US" sz="4000" dirty="0">
@@ -4360,39 +4360,6 @@
           </p:txBody>
         </p:sp>
       </p:grpSp>
-      <p:pic>
-        <p:nvPicPr>
-          <p:cNvPr id="4" name="Content Placeholder 3">
-            <a:extLst>
-              <a:ext uri="{FF2B5EF4-FFF2-40B4-BE49-F238E27FC236}">
-                <a16:creationId xmlns:a16="http://schemas.microsoft.com/office/drawing/2014/main" id="{2D056011-D9BD-961F-C204-11077D23CE1A}"/>
-              </a:ext>
-            </a:extLst>
-          </p:cNvPr>
-          <p:cNvPicPr>
-            <a:picLocks noGrp="1" noChangeAspect="1"/>
-          </p:cNvPicPr>
-          <p:nvPr>
-            <p:ph idx="1"/>
-          </p:nvPr>
-        </p:nvPicPr>
-        <p:blipFill>
-          <a:blip r:embed="rId2"/>
-          <a:srcRect t="327" b="10388"/>
-          <a:stretch>
-            <a:fillRect/>
-          </a:stretch>
-        </p:blipFill>
-        <p:spPr>
-          <a:xfrm>
-            <a:off x="818048" y="753455"/>
-            <a:ext cx="10555905" cy="2968823"/>
-          </a:xfrm>
-          <a:prstGeom prst="rect">
-            <a:avLst/>
-          </a:prstGeom>
-        </p:spPr>
-      </p:pic>
       <p:grpSp>
         <p:nvGrpSpPr>
           <p:cNvPr id="82" name="Group 81">
@@ -5663,7 +5630,7 @@
         </p:nvSpPr>
         <p:spPr>
           <a:xfrm>
-            <a:off x="6095999" y="4237290"/>
+            <a:off x="523041" y="1477157"/>
             <a:ext cx="3874093" cy="1477328"/>
           </a:xfrm>
           <a:prstGeom prst="rect">
@@ -5813,6 +5780,136 @@
           </a:p>
           <a:p>
             <a:endParaRPr lang="en-GB" dirty="0"/>
+          </a:p>
+        </p:txBody>
+      </p:sp>
+      <p:sp>
+        <p:nvSpPr>
+          <p:cNvPr id="9" name="Szövegdoboz 8">
+            <a:extLst>
+              <a:ext uri="{FF2B5EF4-FFF2-40B4-BE49-F238E27FC236}">
+                <a16:creationId xmlns:a16="http://schemas.microsoft.com/office/drawing/2014/main" id="{814F007E-1372-4D2B-BA46-9CBFF95D2E74}"/>
+              </a:ext>
+            </a:extLst>
+          </p:cNvPr>
+          <p:cNvSpPr txBox="1"/>
+          <p:nvPr/>
+        </p:nvSpPr>
+        <p:spPr>
+          <a:xfrm>
+            <a:off x="2579843" y="2801208"/>
+            <a:ext cx="1508105" cy="369332"/>
+          </a:xfrm>
+          <a:prstGeom prst="rect">
+            <a:avLst/>
+          </a:prstGeom>
+          <a:noFill/>
+        </p:spPr>
+        <p:txBody>
+          <a:bodyPr wrap="none" rtlCol="0">
+            <a:spAutoFit/>
+          </a:bodyPr>
+          <a:lstStyle/>
+          <a:p>
+            <a:r>
+              <a:rPr lang="hu-HU" dirty="0"/>
+              <a:t>Mobilos nézet</a:t>
+            </a:r>
+          </a:p>
+        </p:txBody>
+      </p:sp>
+      <p:pic>
+        <p:nvPicPr>
+          <p:cNvPr id="11" name="Kép 10">
+            <a:extLst>
+              <a:ext uri="{FF2B5EF4-FFF2-40B4-BE49-F238E27FC236}">
+                <a16:creationId xmlns:a16="http://schemas.microsoft.com/office/drawing/2014/main" id="{506C5241-8988-43CE-9CCD-A0B66B3856C2}"/>
+              </a:ext>
+            </a:extLst>
+          </p:cNvPr>
+          <p:cNvPicPr>
+            <a:picLocks noChangeAspect="1"/>
+          </p:cNvPicPr>
+          <p:nvPr/>
+        </p:nvPicPr>
+        <p:blipFill>
+          <a:blip r:embed="rId2"/>
+          <a:stretch>
+            <a:fillRect/>
+          </a:stretch>
+        </p:blipFill>
+        <p:spPr>
+          <a:xfrm>
+            <a:off x="5604932" y="3785437"/>
+            <a:ext cx="5985933" cy="1923929"/>
+          </a:xfrm>
+          <a:prstGeom prst="rect">
+            <a:avLst/>
+          </a:prstGeom>
+        </p:spPr>
+      </p:pic>
+      <p:pic>
+        <p:nvPicPr>
+          <p:cNvPr id="13" name="Kép 12">
+            <a:extLst>
+              <a:ext uri="{FF2B5EF4-FFF2-40B4-BE49-F238E27FC236}">
+                <a16:creationId xmlns:a16="http://schemas.microsoft.com/office/drawing/2014/main" id="{04586B11-02E1-45F1-86E7-FA13FE969529}"/>
+              </a:ext>
+            </a:extLst>
+          </p:cNvPr>
+          <p:cNvPicPr>
+            <a:picLocks noChangeAspect="1"/>
+          </p:cNvPicPr>
+          <p:nvPr/>
+        </p:nvPicPr>
+        <p:blipFill>
+          <a:blip r:embed="rId3"/>
+          <a:stretch>
+            <a:fillRect/>
+          </a:stretch>
+        </p:blipFill>
+        <p:spPr>
+          <a:xfrm>
+            <a:off x="2040540" y="3398333"/>
+            <a:ext cx="2838417" cy="3015819"/>
+          </a:xfrm>
+          <a:prstGeom prst="rect">
+            <a:avLst/>
+          </a:prstGeom>
+        </p:spPr>
+      </p:pic>
+      <p:sp>
+        <p:nvSpPr>
+          <p:cNvPr id="14" name="Szövegdoboz 13">
+            <a:extLst>
+              <a:ext uri="{FF2B5EF4-FFF2-40B4-BE49-F238E27FC236}">
+                <a16:creationId xmlns:a16="http://schemas.microsoft.com/office/drawing/2014/main" id="{732BFCEE-61F3-4F6C-A0C2-6737D490F574}"/>
+              </a:ext>
+            </a:extLst>
+          </p:cNvPr>
+          <p:cNvSpPr txBox="1"/>
+          <p:nvPr/>
+        </p:nvSpPr>
+        <p:spPr>
+          <a:xfrm>
+            <a:off x="7213600" y="2801208"/>
+            <a:ext cx="2037096" cy="369332"/>
+          </a:xfrm>
+          <a:prstGeom prst="rect">
+            <a:avLst/>
+          </a:prstGeom>
+          <a:noFill/>
+        </p:spPr>
+        <p:txBody>
+          <a:bodyPr wrap="none" rtlCol="0">
+            <a:spAutoFit/>
+          </a:bodyPr>
+          <a:lstStyle/>
+          <a:p>
+            <a:r>
+              <a:rPr lang="hu-HU" dirty="0"/>
+              <a:t>Számítógépes nézet</a:t>
+            </a:r>
           </a:p>
         </p:txBody>
       </p:sp>
@@ -7263,7 +7360,7 @@
         </p:nvSpPr>
         <p:spPr>
           <a:xfrm>
-            <a:off x="630935" y="4018137"/>
+            <a:off x="285457" y="394859"/>
             <a:ext cx="5071221" cy="2129586"/>
           </a:xfrm>
           <a:noFill/>
@@ -7337,8 +7434,8 @@
         </p:blipFill>
         <p:spPr>
           <a:xfrm>
-            <a:off x="631359" y="1518496"/>
-            <a:ext cx="10843065" cy="1463814"/>
+            <a:off x="4715056" y="3561049"/>
+            <a:ext cx="7050616" cy="951833"/>
           </a:xfrm>
           <a:prstGeom prst="rect">
             <a:avLst/>
@@ -7701,7 +7798,7 @@
         </p:nvSpPr>
         <p:spPr>
           <a:xfrm>
-            <a:off x="5925304" y="4018143"/>
+            <a:off x="369811" y="1976348"/>
             <a:ext cx="5549111" cy="2129599"/>
           </a:xfrm>
           <a:noFill/>
@@ -7969,6 +8066,114 @@
                 <a:cs typeface="+mn-cs"/>
               </a:rPr>
               <a:t>.</a:t>
+            </a:r>
+          </a:p>
+        </p:txBody>
+      </p:sp>
+      <p:pic>
+        <p:nvPicPr>
+          <p:cNvPr id="5" name="Kép 4">
+            <a:extLst>
+              <a:ext uri="{FF2B5EF4-FFF2-40B4-BE49-F238E27FC236}">
+                <a16:creationId xmlns:a16="http://schemas.microsoft.com/office/drawing/2014/main" id="{60C8DA5B-0564-44BF-A08E-5D4D1BA8133D}"/>
+              </a:ext>
+            </a:extLst>
+          </p:cNvPr>
+          <p:cNvPicPr>
+            <a:picLocks noChangeAspect="1"/>
+          </p:cNvPicPr>
+          <p:nvPr/>
+        </p:nvPicPr>
+        <p:blipFill>
+          <a:blip r:embed="rId3"/>
+          <a:stretch>
+            <a:fillRect/>
+          </a:stretch>
+        </p:blipFill>
+        <p:spPr>
+          <a:xfrm>
+            <a:off x="999085" y="3918856"/>
+            <a:ext cx="3982114" cy="1750146"/>
+          </a:xfrm>
+          <a:prstGeom prst="rect">
+            <a:avLst/>
+          </a:prstGeom>
+        </p:spPr>
+      </p:pic>
+      <p:sp>
+        <p:nvSpPr>
+          <p:cNvPr id="6" name="Szövegdoboz 5">
+            <a:extLst>
+              <a:ext uri="{FF2B5EF4-FFF2-40B4-BE49-F238E27FC236}">
+                <a16:creationId xmlns:a16="http://schemas.microsoft.com/office/drawing/2014/main" id="{49D8DE47-85C2-4529-B215-BA7B281318ED}"/>
+              </a:ext>
+            </a:extLst>
+          </p:cNvPr>
+          <p:cNvSpPr txBox="1"/>
+          <p:nvPr/>
+        </p:nvSpPr>
+        <p:spPr>
+          <a:xfrm>
+            <a:off x="2039100" y="3041147"/>
+            <a:ext cx="1508105" cy="369332"/>
+          </a:xfrm>
+          <a:prstGeom prst="rect">
+            <a:avLst/>
+          </a:prstGeom>
+          <a:noFill/>
+        </p:spPr>
+        <p:txBody>
+          <a:bodyPr wrap="none" rtlCol="0">
+            <a:spAutoFit/>
+          </a:bodyPr>
+          <a:lstStyle/>
+          <a:p>
+            <a:r>
+              <a:rPr lang="hu-HU" dirty="0">
+                <a:solidFill>
+                  <a:schemeClr val="bg1"/>
+                </a:solidFill>
+              </a:rPr>
+              <a:t>Mobilos nézet</a:t>
+            </a:r>
+          </a:p>
+        </p:txBody>
+      </p:sp>
+      <p:sp>
+        <p:nvSpPr>
+          <p:cNvPr id="7" name="Szövegdoboz 6">
+            <a:extLst>
+              <a:ext uri="{FF2B5EF4-FFF2-40B4-BE49-F238E27FC236}">
+                <a16:creationId xmlns:a16="http://schemas.microsoft.com/office/drawing/2014/main" id="{62B6D3FD-0A17-49CA-B491-CDC62120D168}"/>
+              </a:ext>
+            </a:extLst>
+          </p:cNvPr>
+          <p:cNvSpPr txBox="1"/>
+          <p:nvPr/>
+        </p:nvSpPr>
+        <p:spPr>
+          <a:xfrm>
+            <a:off x="6654800" y="3041147"/>
+            <a:ext cx="2037096" cy="369332"/>
+          </a:xfrm>
+          <a:prstGeom prst="rect">
+            <a:avLst/>
+          </a:prstGeom>
+          <a:noFill/>
+        </p:spPr>
+        <p:txBody>
+          <a:bodyPr wrap="none" rtlCol="0">
+            <a:spAutoFit/>
+          </a:bodyPr>
+          <a:lstStyle/>
+          <a:p>
+            <a:r>
+              <a:rPr lang="hu-HU" dirty="0">
+                <a:solidFill>
+                  <a:schemeClr val="bg1"/>
+                </a:solidFill>
+              </a:rPr>
+              <a:t>Számítógépes nézet</a:t>
             </a:r>
           </a:p>
         </p:txBody>
@@ -8152,8 +8357,8 @@
         </p:nvSpPr>
         <p:spPr>
           <a:xfrm>
-            <a:off x="755903" y="3399769"/>
-            <a:ext cx="10640754" cy="775845"/>
+            <a:off x="381000" y="377170"/>
+            <a:ext cx="4030657" cy="775845"/>
           </a:xfrm>
         </p:spPr>
         <p:txBody>
@@ -8164,7 +8369,7 @@
           <a:p>
             <a:pPr algn="ctr"/>
             <a:r>
-              <a:rPr lang="en-US" sz="4000" kern="1200">
+              <a:rPr lang="en-US" sz="4000" kern="1200" dirty="0">
                 <a:solidFill>
                   <a:schemeClr val="tx2"/>
                 </a:solidFill>
@@ -8172,7 +8377,29 @@
                 <a:ea typeface="+mj-ea"/>
                 <a:cs typeface="+mj-cs"/>
               </a:rPr>
-              <a:t>A szolgáltatások:</a:t>
+              <a:t>A </a:t>
+            </a:r>
+            <a:r>
+              <a:rPr lang="en-US" sz="4000" kern="1200" dirty="0" err="1">
+                <a:solidFill>
+                  <a:schemeClr val="tx2"/>
+                </a:solidFill>
+                <a:latin typeface="+mj-lt"/>
+                <a:ea typeface="+mj-ea"/>
+                <a:cs typeface="+mj-cs"/>
+              </a:rPr>
+              <a:t>szolgáltatások</a:t>
+            </a:r>
+            <a:r>
+              <a:rPr lang="en-US" sz="4000" kern="1200" dirty="0">
+                <a:solidFill>
+                  <a:schemeClr val="tx2"/>
+                </a:solidFill>
+                <a:latin typeface="+mj-lt"/>
+                <a:ea typeface="+mj-ea"/>
+                <a:cs typeface="+mj-cs"/>
+              </a:rPr>
+              <a:t>:</a:t>
             </a:r>
           </a:p>
         </p:txBody>
@@ -8195,7 +8422,7 @@
         </p:nvSpPr>
         <p:spPr>
           <a:xfrm>
-            <a:off x="1514121" y="4171528"/>
+            <a:off x="381000" y="1270729"/>
             <a:ext cx="9163757" cy="450447"/>
           </a:xfrm>
         </p:spPr>
@@ -8209,7 +8436,7 @@
               <a:buNone/>
             </a:pPr>
             <a:r>
-              <a:rPr lang="en-US" sz="1700" kern="1200">
+              <a:rPr lang="en-US" sz="1700" kern="1200" dirty="0" err="1">
                 <a:solidFill>
                   <a:schemeClr val="tx2"/>
                 </a:solidFill>
@@ -8217,7 +8444,227 @@
                 <a:ea typeface="+mn-ea"/>
                 <a:cs typeface="+mn-cs"/>
               </a:rPr>
-              <a:t>Ezen a részen 8 kártya található, amiken felsoroljuk a szolgáltatásaink különböző típusait.</a:t>
+              <a:t>Ezen</a:t>
+            </a:r>
+            <a:r>
+              <a:rPr lang="en-US" sz="1700" kern="1200" dirty="0">
+                <a:solidFill>
+                  <a:schemeClr val="tx2"/>
+                </a:solidFill>
+                <a:latin typeface="+mn-lt"/>
+                <a:ea typeface="+mn-ea"/>
+                <a:cs typeface="+mn-cs"/>
+              </a:rPr>
+              <a:t> a </a:t>
+            </a:r>
+            <a:r>
+              <a:rPr lang="en-US" sz="1700" kern="1200" dirty="0" err="1">
+                <a:solidFill>
+                  <a:schemeClr val="tx2"/>
+                </a:solidFill>
+                <a:latin typeface="+mn-lt"/>
+                <a:ea typeface="+mn-ea"/>
+                <a:cs typeface="+mn-cs"/>
+              </a:rPr>
+              <a:t>részen</a:t>
+            </a:r>
+            <a:r>
+              <a:rPr lang="en-US" sz="1700" kern="1200" dirty="0">
+                <a:solidFill>
+                  <a:schemeClr val="tx2"/>
+                </a:solidFill>
+                <a:latin typeface="+mn-lt"/>
+                <a:ea typeface="+mn-ea"/>
+                <a:cs typeface="+mn-cs"/>
+              </a:rPr>
+              <a:t> 8</a:t>
+            </a:r>
+            <a:r>
+              <a:rPr lang="hu-HU" sz="1700" kern="1200" dirty="0">
+                <a:solidFill>
+                  <a:schemeClr val="tx2"/>
+                </a:solidFill>
+                <a:latin typeface="+mn-lt"/>
+                <a:ea typeface="+mn-ea"/>
+                <a:cs typeface="+mn-cs"/>
+              </a:rPr>
+              <a:t> </a:t>
+            </a:r>
+            <a:r>
+              <a:rPr lang="hu-HU" sz="1700" kern="1200" dirty="0" err="1">
+                <a:solidFill>
+                  <a:schemeClr val="tx2"/>
+                </a:solidFill>
+                <a:latin typeface="+mn-lt"/>
+                <a:ea typeface="+mn-ea"/>
+                <a:cs typeface="+mn-cs"/>
+              </a:rPr>
+              <a:t>flexbox</a:t>
+            </a:r>
+            <a:r>
+              <a:rPr lang="en-US" sz="1700" kern="1200" dirty="0">
+                <a:solidFill>
+                  <a:schemeClr val="tx2"/>
+                </a:solidFill>
+                <a:latin typeface="+mn-lt"/>
+                <a:ea typeface="+mn-ea"/>
+                <a:cs typeface="+mn-cs"/>
+              </a:rPr>
+              <a:t> </a:t>
+            </a:r>
+            <a:r>
+              <a:rPr lang="en-US" sz="1700" kern="1200" dirty="0" err="1">
+                <a:solidFill>
+                  <a:schemeClr val="tx2"/>
+                </a:solidFill>
+                <a:latin typeface="+mn-lt"/>
+                <a:ea typeface="+mn-ea"/>
+                <a:cs typeface="+mn-cs"/>
+              </a:rPr>
+              <a:t>kártya</a:t>
+            </a:r>
+            <a:r>
+              <a:rPr lang="en-US" sz="1700" kern="1200" dirty="0">
+                <a:solidFill>
+                  <a:schemeClr val="tx2"/>
+                </a:solidFill>
+                <a:latin typeface="+mn-lt"/>
+                <a:ea typeface="+mn-ea"/>
+                <a:cs typeface="+mn-cs"/>
+              </a:rPr>
+              <a:t> </a:t>
+            </a:r>
+            <a:r>
+              <a:rPr lang="en-US" sz="1700" kern="1200" dirty="0" err="1">
+                <a:solidFill>
+                  <a:schemeClr val="tx2"/>
+                </a:solidFill>
+                <a:latin typeface="+mn-lt"/>
+                <a:ea typeface="+mn-ea"/>
+                <a:cs typeface="+mn-cs"/>
+              </a:rPr>
+              <a:t>található</a:t>
+            </a:r>
+            <a:r>
+              <a:rPr lang="en-US" sz="1700" kern="1200" dirty="0">
+                <a:solidFill>
+                  <a:schemeClr val="tx2"/>
+                </a:solidFill>
+                <a:latin typeface="+mn-lt"/>
+                <a:ea typeface="+mn-ea"/>
+                <a:cs typeface="+mn-cs"/>
+              </a:rPr>
+              <a:t>, </a:t>
+            </a:r>
+            <a:r>
+              <a:rPr lang="en-US" sz="1700" kern="1200" dirty="0" err="1">
+                <a:solidFill>
+                  <a:schemeClr val="tx2"/>
+                </a:solidFill>
+                <a:latin typeface="+mn-lt"/>
+                <a:ea typeface="+mn-ea"/>
+                <a:cs typeface="+mn-cs"/>
+              </a:rPr>
+              <a:t>amiken</a:t>
+            </a:r>
+            <a:r>
+              <a:rPr lang="en-US" sz="1700" kern="1200" dirty="0">
+                <a:solidFill>
+                  <a:schemeClr val="tx2"/>
+                </a:solidFill>
+                <a:latin typeface="+mn-lt"/>
+                <a:ea typeface="+mn-ea"/>
+                <a:cs typeface="+mn-cs"/>
+              </a:rPr>
+              <a:t> </a:t>
+            </a:r>
+            <a:r>
+              <a:rPr lang="en-US" sz="1700" kern="1200" dirty="0" err="1">
+                <a:solidFill>
+                  <a:schemeClr val="tx2"/>
+                </a:solidFill>
+                <a:latin typeface="+mn-lt"/>
+                <a:ea typeface="+mn-ea"/>
+                <a:cs typeface="+mn-cs"/>
+              </a:rPr>
+              <a:t>felsoroljuk</a:t>
+            </a:r>
+            <a:r>
+              <a:rPr lang="en-US" sz="1700" kern="1200" dirty="0">
+                <a:solidFill>
+                  <a:schemeClr val="tx2"/>
+                </a:solidFill>
+                <a:latin typeface="+mn-lt"/>
+                <a:ea typeface="+mn-ea"/>
+                <a:cs typeface="+mn-cs"/>
+              </a:rPr>
+              <a:t> a </a:t>
+            </a:r>
+            <a:r>
+              <a:rPr lang="en-US" sz="1700" kern="1200" dirty="0" err="1">
+                <a:solidFill>
+                  <a:schemeClr val="tx2"/>
+                </a:solidFill>
+                <a:latin typeface="+mn-lt"/>
+                <a:ea typeface="+mn-ea"/>
+                <a:cs typeface="+mn-cs"/>
+              </a:rPr>
+              <a:t>szolgáltatásaink</a:t>
+            </a:r>
+            <a:r>
+              <a:rPr lang="en-US" sz="1700" kern="1200" dirty="0">
+                <a:solidFill>
+                  <a:schemeClr val="tx2"/>
+                </a:solidFill>
+                <a:latin typeface="+mn-lt"/>
+                <a:ea typeface="+mn-ea"/>
+                <a:cs typeface="+mn-cs"/>
+              </a:rPr>
+              <a:t> </a:t>
+            </a:r>
+            <a:r>
+              <a:rPr lang="en-US" sz="1700" kern="1200" dirty="0" err="1">
+                <a:solidFill>
+                  <a:schemeClr val="tx2"/>
+                </a:solidFill>
+                <a:latin typeface="+mn-lt"/>
+                <a:ea typeface="+mn-ea"/>
+                <a:cs typeface="+mn-cs"/>
+              </a:rPr>
+              <a:t>különböző</a:t>
+            </a:r>
+            <a:r>
+              <a:rPr lang="en-US" sz="1700" kern="1200" dirty="0">
+                <a:solidFill>
+                  <a:schemeClr val="tx2"/>
+                </a:solidFill>
+                <a:latin typeface="+mn-lt"/>
+                <a:ea typeface="+mn-ea"/>
+                <a:cs typeface="+mn-cs"/>
+              </a:rPr>
+              <a:t> </a:t>
+            </a:r>
+            <a:r>
+              <a:rPr lang="en-US" sz="1700" kern="1200" dirty="0" err="1">
+                <a:solidFill>
+                  <a:schemeClr val="tx2"/>
+                </a:solidFill>
+                <a:latin typeface="+mn-lt"/>
+                <a:ea typeface="+mn-ea"/>
+                <a:cs typeface="+mn-cs"/>
+              </a:rPr>
+              <a:t>típusait</a:t>
+            </a:r>
+            <a:r>
+              <a:rPr lang="en-US" sz="1700" kern="1200" dirty="0">
+                <a:solidFill>
+                  <a:schemeClr val="tx2"/>
+                </a:solidFill>
+                <a:latin typeface="+mn-lt"/>
+                <a:ea typeface="+mn-ea"/>
+                <a:cs typeface="+mn-cs"/>
+              </a:rPr>
+              <a:t>.</a:t>
             </a:r>
           </a:p>
         </p:txBody>
@@ -9313,8 +9760,8 @@
         </p:blipFill>
         <p:spPr>
           <a:xfrm>
-            <a:off x="1725999" y="320231"/>
-            <a:ext cx="8678549" cy="2836567"/>
+            <a:off x="4860574" y="3803720"/>
+            <a:ext cx="6800521" cy="2222737"/>
           </a:xfrm>
           <a:prstGeom prst="rect">
             <a:avLst/>
@@ -10577,6 +11024,106 @@
           </p:txBody>
         </p:sp>
       </p:grpSp>
+      <p:pic>
+        <p:nvPicPr>
+          <p:cNvPr id="3" name="Kép 2">
+            <a:extLst>
+              <a:ext uri="{FF2B5EF4-FFF2-40B4-BE49-F238E27FC236}">
+                <a16:creationId xmlns:a16="http://schemas.microsoft.com/office/drawing/2014/main" id="{8451FBAB-86FD-4709-A0C3-6A325C6DAF56}"/>
+              </a:ext>
+            </a:extLst>
+          </p:cNvPr>
+          <p:cNvPicPr>
+            <a:picLocks noChangeAspect="1"/>
+          </p:cNvPicPr>
+          <p:nvPr/>
+        </p:nvPicPr>
+        <p:blipFill>
+          <a:blip r:embed="rId3"/>
+          <a:stretch>
+            <a:fillRect/>
+          </a:stretch>
+        </p:blipFill>
+        <p:spPr>
+          <a:xfrm>
+            <a:off x="1617350" y="3527767"/>
+            <a:ext cx="3034575" cy="2774641"/>
+          </a:xfrm>
+          <a:prstGeom prst="rect">
+            <a:avLst/>
+          </a:prstGeom>
+        </p:spPr>
+      </p:pic>
+      <p:sp>
+        <p:nvSpPr>
+          <p:cNvPr id="5" name="Szövegdoboz 4">
+            <a:extLst>
+              <a:ext uri="{FF2B5EF4-FFF2-40B4-BE49-F238E27FC236}">
+                <a16:creationId xmlns:a16="http://schemas.microsoft.com/office/drawing/2014/main" id="{8C56365D-614C-4897-87FE-8824577EB917}"/>
+              </a:ext>
+            </a:extLst>
+          </p:cNvPr>
+          <p:cNvSpPr txBox="1"/>
+          <p:nvPr/>
+        </p:nvSpPr>
+        <p:spPr>
+          <a:xfrm>
+            <a:off x="1689178" y="2794000"/>
+            <a:ext cx="2890920" cy="369332"/>
+          </a:xfrm>
+          <a:prstGeom prst="rect">
+            <a:avLst/>
+          </a:prstGeom>
+          <a:noFill/>
+        </p:spPr>
+        <p:txBody>
+          <a:bodyPr wrap="none" rtlCol="0">
+            <a:spAutoFit/>
+          </a:bodyPr>
+          <a:lstStyle/>
+          <a:p>
+            <a:r>
+              <a:rPr lang="hu-HU" dirty="0"/>
+              <a:t>Mobilos nézet (egymás alatt)</a:t>
+            </a:r>
+          </a:p>
+        </p:txBody>
+      </p:sp>
+      <p:sp>
+        <p:nvSpPr>
+          <p:cNvPr id="6" name="Szövegdoboz 5">
+            <a:extLst>
+              <a:ext uri="{FF2B5EF4-FFF2-40B4-BE49-F238E27FC236}">
+                <a16:creationId xmlns:a16="http://schemas.microsoft.com/office/drawing/2014/main" id="{30A8A5EA-7C3C-4DC8-BC8A-40CAA3BEFFAB}"/>
+              </a:ext>
+            </a:extLst>
+          </p:cNvPr>
+          <p:cNvSpPr txBox="1"/>
+          <p:nvPr/>
+        </p:nvSpPr>
+        <p:spPr>
+          <a:xfrm>
+            <a:off x="6908800" y="2804361"/>
+            <a:ext cx="2037096" cy="369332"/>
+          </a:xfrm>
+          <a:prstGeom prst="rect">
+            <a:avLst/>
+          </a:prstGeom>
+          <a:noFill/>
+        </p:spPr>
+        <p:txBody>
+          <a:bodyPr wrap="none" rtlCol="0">
+            <a:spAutoFit/>
+          </a:bodyPr>
+          <a:lstStyle/>
+          <a:p>
+            <a:r>
+              <a:rPr lang="hu-HU" dirty="0"/>
+              <a:t>Számítógépes nézet</a:t>
+            </a:r>
+          </a:p>
+        </p:txBody>
+      </p:sp>
     </p:spTree>
     <p:extLst>
       <p:ext uri="{BB962C8B-B14F-4D97-AF65-F5344CB8AC3E}">
@@ -12787,44 +13334,26 @@
               <a:rPr lang="en-US" sz="1800" dirty="0"/>
               <a:t>.</a:t>
             </a:r>
+            <a:endParaRPr lang="hu-HU" sz="1800" dirty="0"/>
           </a:p>
           <a:p>
             <a:r>
-              <a:rPr lang="en-US" sz="1800" dirty="0"/>
-              <a:t>Miután </a:t>
-            </a:r>
-            <a:r>
-              <a:rPr lang="en-US" sz="1800" dirty="0" err="1"/>
-              <a:t>megkaptuk</a:t>
-            </a:r>
-            <a:r>
-              <a:rPr lang="en-US" sz="1800" dirty="0"/>
-              <a:t> a </a:t>
-            </a:r>
-            <a:r>
-              <a:rPr lang="en-US" sz="1800" dirty="0" err="1"/>
-              <a:t>foglalást</a:t>
-            </a:r>
-            <a:r>
-              <a:rPr lang="en-US" sz="1800" dirty="0"/>
-              <a:t> </a:t>
-            </a:r>
-            <a:r>
-              <a:rPr lang="en-US" sz="1800" dirty="0" err="1"/>
-              <a:t>emailben</a:t>
-            </a:r>
-            <a:r>
-              <a:rPr lang="en-US" sz="1800" dirty="0"/>
-              <a:t> </a:t>
-            </a:r>
-            <a:r>
-              <a:rPr lang="en-US" sz="1800" dirty="0" err="1"/>
-              <a:t>válaszolunk</a:t>
-            </a:r>
-            <a:r>
-              <a:rPr lang="en-US" sz="1800" dirty="0"/>
-              <a:t>.</a:t>
-            </a:r>
+              <a:rPr lang="hu-HU" sz="1800" dirty="0"/>
+              <a:t>Ha mégsem szeretnénk foglalást leadni, akkor a bal felső sarokban lévő gombbal vissza lehet lépni a fő oldalra.</a:t>
+            </a:r>
+          </a:p>
+          <a:p>
+            <a:r>
+              <a:rPr lang="hu-HU" sz="1800" dirty="0"/>
+              <a:t>A bérlés napja a mai nap után kell hogy legyen.</a:t>
+            </a:r>
+          </a:p>
+          <a:p>
+            <a:r>
+              <a:rPr lang="hu-HU" sz="1800" dirty="0"/>
+              <a:t>Az adatok megadása feltételhez kötött.</a:t>
+            </a:r>
+            <a:endParaRPr lang="en-US" sz="1800" dirty="0"/>
           </a:p>
         </p:txBody>
       </p:sp>
